--- a/public/templates/joint-business-plan-template.pptx
+++ b/public/templates/joint-business-plan-template.pptx
@@ -4336,7 +4336,7 @@
                 <a:ea typeface="Aptos" pitchFamily="34" charset="-122"/>
                 <a:cs typeface="Aptos" pitchFamily="34" charset="-120"/>
               </a:rPr>
-              <a:t>Editable chart placeholder</a:t>
+              <a:t>Editable chart area</a:t>
             </a:r>
             <a:endParaRPr lang="en-US" sz="1000" dirty="0"/>
           </a:p>
@@ -6505,7 +6505,7 @@
                 <a:ea typeface="Aptos" pitchFamily="34" charset="-122"/>
                 <a:cs typeface="Aptos" pitchFamily="34" charset="-120"/>
               </a:rPr>
-              <a:t>Editable chart placeholder</a:t>
+              <a:t>Editable chart area</a:t>
             </a:r>
             <a:endParaRPr lang="en-US" sz="1000" dirty="0"/>
           </a:p>
@@ -8674,7 +8674,7 @@
                 <a:ea typeface="Aptos" pitchFamily="34" charset="-122"/>
                 <a:cs typeface="Aptos" pitchFamily="34" charset="-120"/>
               </a:rPr>
-              <a:t>Editable chart placeholder</a:t>
+              <a:t>Editable chart area</a:t>
             </a:r>
             <a:endParaRPr lang="en-US" sz="1000" dirty="0"/>
           </a:p>
@@ -10843,7 +10843,7 @@
                 <a:ea typeface="Aptos" pitchFamily="34" charset="-122"/>
                 <a:cs typeface="Aptos" pitchFamily="34" charset="-120"/>
               </a:rPr>
-              <a:t>Editable chart placeholder</a:t>
+              <a:t>Editable chart area</a:t>
             </a:r>
             <a:endParaRPr lang="en-US" sz="1000" dirty="0"/>
           </a:p>
@@ -13012,7 +13012,7 @@
                 <a:ea typeface="Aptos" pitchFamily="34" charset="-122"/>
                 <a:cs typeface="Aptos" pitchFamily="34" charset="-120"/>
               </a:rPr>
-              <a:t>Editable chart placeholder</a:t>
+              <a:t>Editable chart area</a:t>
             </a:r>
             <a:endParaRPr lang="en-US" sz="1000" dirty="0"/>
           </a:p>
@@ -15181,7 +15181,7 @@
                 <a:ea typeface="Aptos" pitchFamily="34" charset="-122"/>
                 <a:cs typeface="Aptos" pitchFamily="34" charset="-120"/>
               </a:rPr>
-              <a:t>Editable chart placeholder</a:t>
+              <a:t>Editable chart area</a:t>
             </a:r>
             <a:endParaRPr lang="en-US" sz="1000" dirty="0"/>
           </a:p>
@@ -17350,7 +17350,7 @@
                 <a:ea typeface="Aptos" pitchFamily="34" charset="-122"/>
                 <a:cs typeface="Aptos" pitchFamily="34" charset="-120"/>
               </a:rPr>
-              <a:t>Editable chart placeholder</a:t>
+              <a:t>Editable chart area</a:t>
             </a:r>
             <a:endParaRPr lang="en-US" sz="1000" dirty="0"/>
           </a:p>
@@ -19519,7 +19519,7 @@
                 <a:ea typeface="Aptos" pitchFamily="34" charset="-122"/>
                 <a:cs typeface="Aptos" pitchFamily="34" charset="-120"/>
               </a:rPr>
-              <a:t>Editable chart placeholder</a:t>
+              <a:t>Editable chart area</a:t>
             </a:r>
             <a:endParaRPr lang="en-US" sz="1000" dirty="0"/>
           </a:p>
@@ -21688,7 +21688,7 @@
                 <a:ea typeface="Aptos" pitchFamily="34" charset="-122"/>
                 <a:cs typeface="Aptos" pitchFamily="34" charset="-120"/>
               </a:rPr>
-              <a:t>Editable chart placeholder</a:t>
+              <a:t>Editable chart area</a:t>
             </a:r>
             <a:endParaRPr lang="en-US" sz="1000" dirty="0"/>
           </a:p>
@@ -23857,7 +23857,7 @@
                 <a:ea typeface="Aptos" pitchFamily="34" charset="-122"/>
                 <a:cs typeface="Aptos" pitchFamily="34" charset="-120"/>
               </a:rPr>
-              <a:t>Editable chart placeholder</a:t>
+              <a:t>Editable chart area</a:t>
             </a:r>
             <a:endParaRPr lang="en-US" sz="1000" dirty="0"/>
           </a:p>

--- a/public/templates/joint-business-plan-template.pptx
+++ b/public/templates/joint-business-plan-template.pptx
@@ -1792,7 +1792,7 @@
       </p:sp>
       <p:pic>
         <p:nvPicPr>
-          <p:cNvPr id="3" name="Image 0" descr="/Users/phylsion/Desktop/nam-tools/public/images/branding/logo-full.png">    </p:cNvPr>
+          <p:cNvPr id="3" name="Image 0" descr="APT logo">    </p:cNvPr>
           <p:cNvPicPr>
             <a:picLocks noChangeAspect="1"/>
           </p:cNvPicPr>
@@ -1958,7 +1958,7 @@
       </p:sp>
       <p:pic>
         <p:nvPicPr>
-          <p:cNvPr id="8" name="Image 1" descr="/Users/phylsion/Desktop/nam-tools/public/images/branding/logo-full.png">    </p:cNvPr>
+          <p:cNvPr id="8" name="Image 1" descr="APT logo">    </p:cNvPr>
           <p:cNvPicPr>
             <a:picLocks noChangeAspect="1"/>
           </p:cNvPicPr>
@@ -2110,7 +2110,7 @@
                 <a:ea typeface="Aptos" pitchFamily="34" charset="-122"/>
                 <a:cs typeface="Aptos" pitchFamily="34" charset="-120"/>
               </a:rPr>
-              <a:t>Prepared with editable fictional data for NAM and commercial planning.</a:t>
+              <a:t>Prepared with editable fictional data for account and commercial planning.</a:t>
             </a:r>
             <a:endParaRPr lang="en-US" sz="1300" dirty="0"/>
           </a:p>
@@ -2593,7 +2593,7 @@
       </p:sp>
       <p:pic>
         <p:nvPicPr>
-          <p:cNvPr id="3" name="Image 0" descr="/Users/phylsion/Desktop/nam-tools/public/images/branding/logo-full.png">    </p:cNvPr>
+          <p:cNvPr id="3" name="Image 0" descr="APT logo">    </p:cNvPr>
           <p:cNvPicPr>
             <a:picLocks noChangeAspect="1"/>
           </p:cNvPicPr>
@@ -4762,7 +4762,7 @@
       </p:sp>
       <p:pic>
         <p:nvPicPr>
-          <p:cNvPr id="3" name="Image 0" descr="/Users/phylsion/Desktop/nam-tools/public/images/branding/logo-full.png">    </p:cNvPr>
+          <p:cNvPr id="3" name="Image 0" descr="APT logo">    </p:cNvPr>
           <p:cNvPicPr>
             <a:picLocks noChangeAspect="1"/>
           </p:cNvPicPr>
@@ -6931,7 +6931,7 @@
       </p:sp>
       <p:pic>
         <p:nvPicPr>
-          <p:cNvPr id="3" name="Image 0" descr="/Users/phylsion/Desktop/nam-tools/public/images/branding/logo-full.png">    </p:cNvPr>
+          <p:cNvPr id="3" name="Image 0" descr="APT logo">    </p:cNvPr>
           <p:cNvPicPr>
             <a:picLocks noChangeAspect="1"/>
           </p:cNvPicPr>
@@ -9100,7 +9100,7 @@
       </p:sp>
       <p:pic>
         <p:nvPicPr>
-          <p:cNvPr id="3" name="Image 0" descr="/Users/phylsion/Desktop/nam-tools/public/images/branding/logo-full.png">    </p:cNvPr>
+          <p:cNvPr id="3" name="Image 0" descr="APT logo">    </p:cNvPr>
           <p:cNvPicPr>
             <a:picLocks noChangeAspect="1"/>
           </p:cNvPicPr>
@@ -11269,7 +11269,7 @@
       </p:sp>
       <p:pic>
         <p:nvPicPr>
-          <p:cNvPr id="3" name="Image 0" descr="/Users/phylsion/Desktop/nam-tools/public/images/branding/logo-full.png">    </p:cNvPr>
+          <p:cNvPr id="3" name="Image 0" descr="APT logo">    </p:cNvPr>
           <p:cNvPicPr>
             <a:picLocks noChangeAspect="1"/>
           </p:cNvPicPr>
@@ -13438,7 +13438,7 @@
       </p:sp>
       <p:pic>
         <p:nvPicPr>
-          <p:cNvPr id="3" name="Image 0" descr="/Users/phylsion/Desktop/nam-tools/public/images/branding/logo-full.png">    </p:cNvPr>
+          <p:cNvPr id="3" name="Image 0" descr="APT logo">    </p:cNvPr>
           <p:cNvPicPr>
             <a:picLocks noChangeAspect="1"/>
           </p:cNvPicPr>
@@ -15607,7 +15607,7 @@
       </p:sp>
       <p:pic>
         <p:nvPicPr>
-          <p:cNvPr id="3" name="Image 0" descr="/Users/phylsion/Desktop/nam-tools/public/images/branding/logo-full.png">    </p:cNvPr>
+          <p:cNvPr id="3" name="Image 0" descr="APT logo">    </p:cNvPr>
           <p:cNvPicPr>
             <a:picLocks noChangeAspect="1"/>
           </p:cNvPicPr>
@@ -17776,7 +17776,7 @@
       </p:sp>
       <p:pic>
         <p:nvPicPr>
-          <p:cNvPr id="3" name="Image 0" descr="/Users/phylsion/Desktop/nam-tools/public/images/branding/logo-full.png">    </p:cNvPr>
+          <p:cNvPr id="3" name="Image 0" descr="APT logo">    </p:cNvPr>
           <p:cNvPicPr>
             <a:picLocks noChangeAspect="1"/>
           </p:cNvPicPr>
@@ -19945,7 +19945,7 @@
       </p:sp>
       <p:pic>
         <p:nvPicPr>
-          <p:cNvPr id="3" name="Image 0" descr="/Users/phylsion/Desktop/nam-tools/public/images/branding/logo-full.png">    </p:cNvPr>
+          <p:cNvPr id="3" name="Image 0" descr="APT logo">    </p:cNvPr>
           <p:cNvPicPr>
             <a:picLocks noChangeAspect="1"/>
           </p:cNvPicPr>
@@ -22114,7 +22114,7 @@
       </p:sp>
       <p:pic>
         <p:nvPicPr>
-          <p:cNvPr id="3" name="Image 0" descr="/Users/phylsion/Desktop/nam-tools/public/images/branding/logo-full.png">    </p:cNvPr>
+          <p:cNvPr id="3" name="Image 0" descr="APT logo">    </p:cNvPr>
           <p:cNvPicPr>
             <a:picLocks noChangeAspect="1"/>
           </p:cNvPicPr>
